--- a/산출물/발표자료.pptx
+++ b/산출물/발표자료.pptx
@@ -77,6 +77,41 @@
   <p:sldLayoutIdLst>
     <p:sldLayoutId id="2147483649" r:id="rId1"/>
   </p:sldLayoutIdLst>
+  <p:txStyles>
+    <p:titleStyle>
+      <a:lvl1pPr>
+        <a:defRPr sz="2800" b="1">
+          <a:solidFill>
+            <a:srgbClr val="1F2937"/>
+          </a:solidFill>
+          <a:latin typeface="맑은 고딕"/>
+          <a:ea typeface="맑은 고딕"/>
+        </a:defRPr>
+      </a:lvl1pPr>
+    </p:titleStyle>
+    <p:bodyStyle>
+      <a:lvl1pPr>
+        <a:defRPr sz="1400">
+          <a:solidFill>
+            <a:srgbClr val="1F2937"/>
+          </a:solidFill>
+          <a:latin typeface="맑은 고딕"/>
+          <a:ea typeface="맑은 고딕"/>
+        </a:defRPr>
+      </a:lvl1pPr>
+    </p:bodyStyle>
+    <p:otherStyle>
+      <a:lvl1pPr>
+        <a:defRPr sz="1400">
+          <a:solidFill>
+            <a:srgbClr val="1F2937"/>
+          </a:solidFill>
+          <a:latin typeface="맑은 고딕"/>
+          <a:ea typeface="맑은 고딕"/>
+        </a:defRPr>
+      </a:lvl1pPr>
+    </p:otherStyle>
+  </p:txStyles>
 </p:sldMaster>
 </file>
 
@@ -124,6 +159,7 @@
             <a:normAutofit/>
           </a:bodyPr>
           <a:lstStyle/>
+          <a:p/>
         </p:txBody>
       </p:sp>
       <p:sp>
@@ -313,6 +349,7 @@
             <a:normAutofit/>
           </a:bodyPr>
           <a:lstStyle/>
+          <a:p/>
         </p:txBody>
       </p:sp>
       <p:sp>
@@ -437,7 +474,7 @@
     </p:spTree>
   </p:cSld>
   <p:clrMapOvr>
-    <a:overrideClrMapping bg1="lt1" tx1="dk1" bg2="lt2" tx2="dk2" accent1="accent1" accent2="accent2" accent3="accent3" accent4="accent4" accent5="accent5" accent6="accent6" hlink="hlink" folHlink="folHlink"/>
+    <a:masterClrMapping/>
   </p:clrMapOvr>
 </p:sld>
 </file>
@@ -580,6 +617,7 @@
             <a:normAutofit/>
           </a:bodyPr>
           <a:lstStyle/>
+          <a:p/>
         </p:txBody>
       </p:sp>
       <p:sp>
@@ -657,6 +695,7 @@
             <a:normAutofit/>
           </a:bodyPr>
           <a:lstStyle/>
+          <a:p/>
         </p:txBody>
       </p:sp>
       <p:sp>
@@ -828,6 +867,7 @@
             <a:normAutofit/>
           </a:bodyPr>
           <a:lstStyle/>
+          <a:p/>
         </p:txBody>
       </p:sp>
       <p:sp>
@@ -999,6 +1039,7 @@
             <a:normAutofit/>
           </a:bodyPr>
           <a:lstStyle/>
+          <a:p/>
         </p:txBody>
       </p:sp>
       <p:sp>
@@ -1090,8 +1131,26 @@
                 <a:latin typeface="맑은 고딕"/>
                 <a:ea typeface="맑은 고딕"/>
               </a:rPr>
-              <a:t>텍스트 추출
-/ OCR</a:t>
+              <a:t>텍스트 추출</a:t>
+            </a:r>
+            <a:br>
+              <a:rPr lang="ko-KR" sz="1100" b="1" dirty="0">
+                <a:solidFill>
+                  <a:srgbClr val="1F2937"/>
+                </a:solidFill>
+                <a:latin typeface="맑은 고딕"/>
+                <a:ea typeface="맑은 고딕"/>
+              </a:rPr>
+            </a:br>
+            <a:r>
+              <a:rPr lang="ko-KR" sz="1100" b="1" dirty="0">
+                <a:solidFill>
+                  <a:srgbClr val="1F2937"/>
+                </a:solidFill>
+                <a:latin typeface="맑은 고딕"/>
+                <a:ea typeface="맑은 고딕"/>
+              </a:rPr>
+              <a:t>/ OCR</a:t>
             </a:r>
           </a:p>
         </p:txBody>
@@ -1171,6 +1230,7 @@
             <a:normAutofit/>
           </a:bodyPr>
           <a:lstStyle/>
+          <a:p/>
         </p:txBody>
       </p:sp>
       <p:sp>
@@ -1262,8 +1322,26 @@
                 <a:latin typeface="맑은 고딕"/>
                 <a:ea typeface="맑은 고딕"/>
               </a:rPr>
-              <a:t>읽기 순서
-복원</a:t>
+              <a:t>읽기 순서</a:t>
+            </a:r>
+            <a:br>
+              <a:rPr lang="ko-KR" sz="1100" b="1" dirty="0">
+                <a:solidFill>
+                  <a:srgbClr val="1F2937"/>
+                </a:solidFill>
+                <a:latin typeface="맑은 고딕"/>
+                <a:ea typeface="맑은 고딕"/>
+              </a:rPr>
+            </a:br>
+            <a:r>
+              <a:rPr lang="ko-KR" sz="1100" b="1" dirty="0">
+                <a:solidFill>
+                  <a:srgbClr val="1F2937"/>
+                </a:solidFill>
+                <a:latin typeface="맑은 고딕"/>
+                <a:ea typeface="맑은 고딕"/>
+              </a:rPr>
+              <a:t>복원</a:t>
             </a:r>
           </a:p>
         </p:txBody>
@@ -1343,6 +1421,7 @@
             <a:normAutofit/>
           </a:bodyPr>
           <a:lstStyle/>
+          <a:p/>
         </p:txBody>
       </p:sp>
       <p:sp>
@@ -1434,8 +1513,26 @@
                 <a:latin typeface="맑은 고딕"/>
                 <a:ea typeface="맑은 고딕"/>
               </a:rPr>
-              <a:t>AI 요약
-· 분류</a:t>
+              <a:t>AI 요약</a:t>
+            </a:r>
+            <a:br>
+              <a:rPr lang="ko-KR" sz="1100" b="1" dirty="0">
+                <a:solidFill>
+                  <a:srgbClr val="1F2937"/>
+                </a:solidFill>
+                <a:latin typeface="맑은 고딕"/>
+                <a:ea typeface="맑은 고딕"/>
+              </a:rPr>
+            </a:br>
+            <a:r>
+              <a:rPr lang="ko-KR" sz="1100" b="1" dirty="0">
+                <a:solidFill>
+                  <a:srgbClr val="1F2937"/>
+                </a:solidFill>
+                <a:latin typeface="맑은 고딕"/>
+                <a:ea typeface="맑은 고딕"/>
+              </a:rPr>
+              <a:t>· 분류</a:t>
             </a:r>
           </a:p>
         </p:txBody>
@@ -1515,6 +1612,7 @@
             <a:normAutofit/>
           </a:bodyPr>
           <a:lstStyle/>
+          <a:p/>
         </p:txBody>
       </p:sp>
       <p:sp>
@@ -1639,6 +1737,7 @@
             <a:normAutofit/>
           </a:bodyPr>
           <a:lstStyle/>
+          <a:p/>
         </p:txBody>
       </p:sp>
       <p:sp>
@@ -1667,6 +1766,7 @@
             <a:normAutofit/>
           </a:bodyPr>
           <a:lstStyle/>
+          <a:p/>
         </p:txBody>
       </p:sp>
       <p:sp>
@@ -1890,7 +1990,7 @@
     </p:spTree>
   </p:cSld>
   <p:clrMapOvr>
-    <a:overrideClrMapping bg1="lt1" tx1="dk1" bg2="lt2" tx2="dk2" accent1="accent1" accent2="accent2" accent3="accent3" accent4="accent4" accent5="accent5" accent6="accent6" hlink="hlink" folHlink="folHlink"/>
+    <a:masterClrMapping/>
   </p:clrMapOvr>
 </p:sld>
 </file>
@@ -2033,6 +2133,7 @@
             <a:normAutofit/>
           </a:bodyPr>
           <a:lstStyle/>
+          <a:p/>
         </p:txBody>
       </p:sp>
       <p:sp>
@@ -2063,6 +2164,7 @@
             <a:normAutofit/>
           </a:bodyPr>
           <a:lstStyle/>
+          <a:p/>
         </p:txBody>
       </p:sp>
       <p:sp>
@@ -2232,6 +2334,7 @@
             <a:normAutofit/>
           </a:bodyPr>
           <a:lstStyle/>
+          <a:p/>
         </p:txBody>
       </p:sp>
       <p:sp>
@@ -2401,6 +2504,7 @@
             <a:normAutofit/>
           </a:bodyPr>
           <a:lstStyle/>
+          <a:p/>
         </p:txBody>
       </p:sp>
       <p:sp>
@@ -2570,6 +2674,7 @@
             <a:normAutofit/>
           </a:bodyPr>
           <a:lstStyle/>
+          <a:p/>
         </p:txBody>
       </p:sp>
       <p:sp>
@@ -2741,6 +2846,7 @@
             <a:normAutofit/>
           </a:bodyPr>
           <a:lstStyle/>
+          <a:p/>
         </p:txBody>
       </p:sp>
       <p:sp>
@@ -2944,7 +3050,7 @@
     </p:spTree>
   </p:cSld>
   <p:clrMapOvr>
-    <a:overrideClrMapping bg1="lt1" tx1="dk1" bg2="lt2" tx2="dk2" accent1="accent1" accent2="accent2" accent3="accent3" accent4="accent4" accent5="accent5" accent6="accent6" hlink="hlink" folHlink="folHlink"/>
+    <a:masterClrMapping/>
   </p:clrMapOvr>
 </p:sld>
 </file>
@@ -3087,6 +3193,7 @@
             <a:normAutofit/>
           </a:bodyPr>
           <a:lstStyle/>
+          <a:p/>
         </p:txBody>
       </p:sp>
       <p:sp>
@@ -3164,6 +3271,7 @@
             <a:normAutofit/>
           </a:bodyPr>
           <a:lstStyle/>
+          <a:p/>
         </p:txBody>
       </p:sp>
       <p:sp>
@@ -3192,6 +3300,7 @@
             <a:normAutofit/>
           </a:bodyPr>
           <a:lstStyle/>
+          <a:p/>
         </p:txBody>
       </p:sp>
       <p:sp>
@@ -3362,6 +3471,7 @@
             <a:normAutofit/>
           </a:bodyPr>
           <a:lstStyle/>
+          <a:p/>
         </p:txBody>
       </p:sp>
       <p:sp>
@@ -3390,6 +3500,7 @@
             <a:normAutofit/>
           </a:bodyPr>
           <a:lstStyle/>
+          <a:p/>
         </p:txBody>
       </p:sp>
       <p:sp>
@@ -3560,6 +3671,7 @@
             <a:normAutofit/>
           </a:bodyPr>
           <a:lstStyle/>
+          <a:p/>
         </p:txBody>
       </p:sp>
       <p:sp>
@@ -3588,6 +3700,7 @@
             <a:normAutofit/>
           </a:bodyPr>
           <a:lstStyle/>
+          <a:p/>
         </p:txBody>
       </p:sp>
       <p:sp>
@@ -3758,6 +3871,7 @@
             <a:normAutofit/>
           </a:bodyPr>
           <a:lstStyle/>
+          <a:p/>
         </p:txBody>
       </p:sp>
       <p:sp>
@@ -3786,6 +3900,7 @@
             <a:normAutofit/>
           </a:bodyPr>
           <a:lstStyle/>
+          <a:p/>
         </p:txBody>
       </p:sp>
       <p:sp>
@@ -3869,7 +3984,7 @@
     </p:spTree>
   </p:cSld>
   <p:clrMapOvr>
-    <a:overrideClrMapping bg1="lt1" tx1="dk1" bg2="lt2" tx2="dk2" accent1="accent1" accent2="accent2" accent3="accent3" accent4="accent4" accent5="accent5" accent6="accent6" hlink="hlink" folHlink="folHlink"/>
+    <a:masterClrMapping/>
   </p:clrMapOvr>
 </p:sld>
 </file>
@@ -4012,6 +4127,7 @@
             <a:normAutofit/>
           </a:bodyPr>
           <a:lstStyle/>
+          <a:p/>
         </p:txBody>
       </p:sp>
       <p:sp>
@@ -4089,6 +4205,7 @@
             <a:normAutofit/>
           </a:bodyPr>
           <a:lstStyle/>
+          <a:p/>
         </p:txBody>
       </p:sp>
       <p:sp>
@@ -4117,6 +4234,7 @@
             <a:normAutofit/>
           </a:bodyPr>
           <a:lstStyle/>
+          <a:p/>
         </p:txBody>
       </p:sp>
       <p:sp>
@@ -4318,6 +4436,7 @@
             <a:normAutofit/>
           </a:bodyPr>
           <a:lstStyle/>
+          <a:p/>
         </p:txBody>
       </p:sp>
       <p:sp>
@@ -4346,6 +4465,7 @@
             <a:normAutofit/>
           </a:bodyPr>
           <a:lstStyle/>
+          <a:p/>
         </p:txBody>
       </p:sp>
       <p:sp>
@@ -4548,7 +4668,7 @@
     </p:spTree>
   </p:cSld>
   <p:clrMapOvr>
-    <a:overrideClrMapping bg1="lt1" tx1="dk1" bg2="lt2" tx2="dk2" accent1="accent1" accent2="accent2" accent3="accent3" accent4="accent4" accent5="accent5" accent6="accent6" hlink="hlink" folHlink="folHlink"/>
+    <a:masterClrMapping/>
   </p:clrMapOvr>
 </p:sld>
 </file>
@@ -4691,6 +4811,7 @@
             <a:normAutofit/>
           </a:bodyPr>
           <a:lstStyle/>
+          <a:p/>
         </p:txBody>
       </p:sp>
       <p:sp>
@@ -5394,6 +5515,7 @@
             <a:normAutofit/>
           </a:bodyPr>
           <a:lstStyle/>
+          <a:p/>
         </p:txBody>
       </p:sp>
       <p:sp>
@@ -5422,6 +5544,7 @@
             <a:normAutofit/>
           </a:bodyPr>
           <a:lstStyle/>
+          <a:p/>
         </p:txBody>
       </p:sp>
       <p:sp>
@@ -5567,7 +5690,7 @@
     </p:spTree>
   </p:cSld>
   <p:clrMapOvr>
-    <a:overrideClrMapping bg1="lt1" tx1="dk1" bg2="lt2" tx2="dk2" accent1="accent1" accent2="accent2" accent3="accent3" accent4="accent4" accent5="accent5" accent6="accent6" hlink="hlink" folHlink="folHlink"/>
+    <a:masterClrMapping/>
   </p:clrMapOvr>
 </p:sld>
 </file>
@@ -5710,6 +5833,7 @@
             <a:normAutofit/>
           </a:bodyPr>
           <a:lstStyle/>
+          <a:p/>
         </p:txBody>
       </p:sp>
       <p:sp>
@@ -5787,6 +5911,7 @@
             <a:normAutofit/>
           </a:bodyPr>
           <a:lstStyle/>
+          <a:p/>
         </p:txBody>
       </p:sp>
       <p:sp>
@@ -5958,6 +6083,7 @@
             <a:normAutofit/>
           </a:bodyPr>
           <a:lstStyle/>
+          <a:p/>
         </p:txBody>
       </p:sp>
       <p:sp>
@@ -6049,8 +6175,26 @@
                 <a:latin typeface="맑은 고딕"/>
                 <a:ea typeface="맑은 고딕"/>
               </a:rPr>
-              <a:t>추출 결과
-확인</a:t>
+              <a:t>추출 결과</a:t>
+            </a:r>
+            <a:br>
+              <a:rPr lang="ko-KR" sz="1100" b="1" dirty="0">
+                <a:solidFill>
+                  <a:srgbClr val="1F2937"/>
+                </a:solidFill>
+                <a:latin typeface="맑은 고딕"/>
+                <a:ea typeface="맑은 고딕"/>
+              </a:rPr>
+            </a:br>
+            <a:r>
+              <a:rPr lang="ko-KR" sz="1100" b="1" dirty="0">
+                <a:solidFill>
+                  <a:srgbClr val="1F2937"/>
+                </a:solidFill>
+                <a:latin typeface="맑은 고딕"/>
+                <a:ea typeface="맑은 고딕"/>
+              </a:rPr>
+              <a:t>확인</a:t>
             </a:r>
           </a:p>
         </p:txBody>
@@ -6130,6 +6274,7 @@
             <a:normAutofit/>
           </a:bodyPr>
           <a:lstStyle/>
+          <a:p/>
         </p:txBody>
       </p:sp>
       <p:sp>
@@ -6221,8 +6366,26 @@
                 <a:latin typeface="맑은 고딕"/>
                 <a:ea typeface="맑은 고딕"/>
               </a:rPr>
-              <a:t>요약 · 분류
-실행</a:t>
+              <a:t>요약 · 분류</a:t>
+            </a:r>
+            <a:br>
+              <a:rPr lang="ko-KR" sz="1100" b="1" dirty="0">
+                <a:solidFill>
+                  <a:srgbClr val="1F2937"/>
+                </a:solidFill>
+                <a:latin typeface="맑은 고딕"/>
+                <a:ea typeface="맑은 고딕"/>
+              </a:rPr>
+            </a:br>
+            <a:r>
+              <a:rPr lang="ko-KR" sz="1100" b="1" dirty="0">
+                <a:solidFill>
+                  <a:srgbClr val="1F2937"/>
+                </a:solidFill>
+                <a:latin typeface="맑은 고딕"/>
+                <a:ea typeface="맑은 고딕"/>
+              </a:rPr>
+              <a:t>실행</a:t>
             </a:r>
           </a:p>
         </p:txBody>
@@ -6302,6 +6465,7 @@
             <a:normAutofit/>
           </a:bodyPr>
           <a:lstStyle/>
+          <a:p/>
         </p:txBody>
       </p:sp>
       <p:sp>
@@ -6473,6 +6637,7 @@
             <a:normAutofit/>
           </a:bodyPr>
           <a:lstStyle/>
+          <a:p/>
         </p:txBody>
       </p:sp>
       <p:sp>
@@ -6597,6 +6762,7 @@
             <a:normAutofit/>
           </a:bodyPr>
           <a:lstStyle/>
+          <a:p/>
         </p:txBody>
       </p:sp>
       <p:sp>
@@ -6625,6 +6791,7 @@
             <a:normAutofit/>
           </a:bodyPr>
           <a:lstStyle/>
+          <a:p/>
         </p:txBody>
       </p:sp>
       <p:sp>
@@ -6848,7 +7015,7 @@
     </p:spTree>
   </p:cSld>
   <p:clrMapOvr>
-    <a:overrideClrMapping bg1="lt1" tx1="dk1" bg2="lt2" tx2="dk2" accent1="accent1" accent2="accent2" accent3="accent3" accent4="accent4" accent5="accent5" accent6="accent6" hlink="hlink" folHlink="folHlink"/>
+    <a:masterClrMapping/>
   </p:clrMapOvr>
 </p:sld>
 </file>
@@ -6897,6 +7064,7 @@
             <a:normAutofit/>
           </a:bodyPr>
           <a:lstStyle/>
+          <a:p/>
         </p:txBody>
       </p:sp>
       <p:sp>
@@ -7043,7 +7211,7 @@
     </p:spTree>
   </p:cSld>
   <p:clrMapOvr>
-    <a:overrideClrMapping bg1="lt1" tx1="dk1" bg2="lt2" tx2="dk2" accent1="accent1" accent2="accent2" accent3="accent3" accent4="accent4" accent5="accent5" accent6="accent6" hlink="hlink" folHlink="folHlink"/>
+    <a:masterClrMapping/>
   </p:clrMapOvr>
 </p:sld>
 </file>
@@ -7186,6 +7354,7 @@
             <a:normAutofit/>
           </a:bodyPr>
           <a:lstStyle/>
+          <a:p/>
         </p:txBody>
       </p:sp>
       <p:graphicFrame>
@@ -8032,6 +8201,7 @@
             <a:normAutofit/>
           </a:bodyPr>
           <a:lstStyle/>
+          <a:p/>
         </p:txBody>
       </p:sp>
       <p:sp>
@@ -8060,6 +8230,7 @@
             <a:normAutofit/>
           </a:bodyPr>
           <a:lstStyle/>
+          <a:p/>
         </p:txBody>
       </p:sp>
       <p:sp>
@@ -8143,7 +8314,7 @@
     </p:spTree>
   </p:cSld>
   <p:clrMapOvr>
-    <a:overrideClrMapping bg1="lt1" tx1="dk1" bg2="lt2" tx2="dk2" accent1="accent1" accent2="accent2" accent3="accent3" accent4="accent4" accent5="accent5" accent6="accent6" hlink="hlink" folHlink="folHlink"/>
+    <a:masterClrMapping/>
   </p:clrMapOvr>
 </p:sld>
 </file>
@@ -8286,6 +8457,7 @@
             <a:normAutofit/>
           </a:bodyPr>
           <a:lstStyle/>
+          <a:p/>
         </p:txBody>
       </p:sp>
       <p:sp>
@@ -8363,6 +8535,7 @@
             <a:normAutofit/>
           </a:bodyPr>
           <a:lstStyle/>
+          <a:p/>
         </p:txBody>
       </p:sp>
       <p:sp>
@@ -8391,6 +8564,7 @@
             <a:normAutofit/>
           </a:bodyPr>
           <a:lstStyle/>
+          <a:p/>
         </p:txBody>
       </p:sp>
       <p:sp>
@@ -8561,6 +8735,7 @@
             <a:normAutofit/>
           </a:bodyPr>
           <a:lstStyle/>
+          <a:p/>
         </p:txBody>
       </p:sp>
       <p:sp>
@@ -8589,6 +8764,7 @@
             <a:normAutofit/>
           </a:bodyPr>
           <a:lstStyle/>
+          <a:p/>
         </p:txBody>
       </p:sp>
       <p:sp>
@@ -8759,6 +8935,7 @@
             <a:normAutofit/>
           </a:bodyPr>
           <a:lstStyle/>
+          <a:p/>
         </p:txBody>
       </p:sp>
       <p:sp>
@@ -8787,6 +8964,7 @@
             <a:normAutofit/>
           </a:bodyPr>
           <a:lstStyle/>
+          <a:p/>
         </p:txBody>
       </p:sp>
       <p:sp>
@@ -8932,7 +9110,7 @@
     </p:spTree>
   </p:cSld>
   <p:clrMapOvr>
-    <a:overrideClrMapping bg1="lt1" tx1="dk1" bg2="lt2" tx2="dk2" accent1="accent1" accent2="accent2" accent3="accent3" accent4="accent4" accent5="accent5" accent6="accent6" hlink="hlink" folHlink="folHlink"/>
+    <a:masterClrMapping/>
   </p:clrMapOvr>
 </p:sld>
 </file>
@@ -9075,6 +9253,7 @@
             <a:normAutofit/>
           </a:bodyPr>
           <a:lstStyle/>
+          <a:p/>
         </p:txBody>
       </p:sp>
       <p:sp>
@@ -9928,6 +10107,7 @@
             <a:normAutofit/>
           </a:bodyPr>
           <a:lstStyle/>
+          <a:p/>
         </p:txBody>
       </p:sp>
       <p:sp>
@@ -9956,6 +10136,7 @@
             <a:normAutofit/>
           </a:bodyPr>
           <a:lstStyle/>
+          <a:p/>
         </p:txBody>
       </p:sp>
       <p:sp>
@@ -10039,7 +10220,7 @@
     </p:spTree>
   </p:cSld>
   <p:clrMapOvr>
-    <a:overrideClrMapping bg1="lt1" tx1="dk1" bg2="lt2" tx2="dk2" accent1="accent1" accent2="accent2" accent3="accent3" accent4="accent4" accent5="accent5" accent6="accent6" hlink="hlink" folHlink="folHlink"/>
+    <a:masterClrMapping/>
   </p:clrMapOvr>
 </p:sld>
 </file>
@@ -10182,6 +10363,7 @@
             <a:normAutofit/>
           </a:bodyPr>
           <a:lstStyle/>
+          <a:p/>
         </p:txBody>
       </p:sp>
       <p:sp>
@@ -10304,6 +10486,7 @@
             <a:normAutofit/>
           </a:bodyPr>
           <a:lstStyle/>
+          <a:p/>
         </p:txBody>
       </p:sp>
       <p:sp>
@@ -10426,6 +10609,7 @@
             <a:normAutofit/>
           </a:bodyPr>
           <a:lstStyle/>
+          <a:p/>
         </p:txBody>
       </p:sp>
       <p:sp>
@@ -10548,6 +10732,7 @@
             <a:normAutofit/>
           </a:bodyPr>
           <a:lstStyle/>
+          <a:p/>
         </p:txBody>
       </p:sp>
       <p:sp>
@@ -10670,6 +10855,7 @@
             <a:normAutofit/>
           </a:bodyPr>
           <a:lstStyle/>
+          <a:p/>
         </p:txBody>
       </p:sp>
       <p:sp>
@@ -10792,6 +10978,7 @@
             <a:normAutofit/>
           </a:bodyPr>
           <a:lstStyle/>
+          <a:p/>
         </p:txBody>
       </p:sp>
       <p:sp>
@@ -10844,7 +11031,7 @@
     </p:spTree>
   </p:cSld>
   <p:clrMapOvr>
-    <a:overrideClrMapping bg1="lt1" tx1="dk1" bg2="lt2" tx2="dk2" accent1="accent1" accent2="accent2" accent3="accent3" accent4="accent4" accent5="accent5" accent6="accent6" hlink="hlink" folHlink="folHlink"/>
+    <a:masterClrMapping/>
   </p:clrMapOvr>
 </p:sld>
 </file>
@@ -10987,6 +11174,7 @@
             <a:normAutofit/>
           </a:bodyPr>
           <a:lstStyle/>
+          <a:p/>
         </p:txBody>
       </p:sp>
       <p:sp>
@@ -11017,6 +11205,7 @@
             <a:normAutofit/>
           </a:bodyPr>
           <a:lstStyle/>
+          <a:p/>
         </p:txBody>
       </p:sp>
       <p:sp>
@@ -11045,6 +11234,7 @@
             <a:normAutofit/>
           </a:bodyPr>
           <a:lstStyle/>
+          <a:p/>
         </p:txBody>
       </p:sp>
       <p:sp>
@@ -11184,6 +11374,7 @@
             <a:normAutofit/>
           </a:bodyPr>
           <a:lstStyle/>
+          <a:p/>
         </p:txBody>
       </p:sp>
       <p:sp>
@@ -11212,6 +11403,7 @@
             <a:normAutofit/>
           </a:bodyPr>
           <a:lstStyle/>
+          <a:p/>
         </p:txBody>
       </p:sp>
       <p:sp>
@@ -11351,6 +11543,7 @@
             <a:normAutofit/>
           </a:bodyPr>
           <a:lstStyle/>
+          <a:p/>
         </p:txBody>
       </p:sp>
       <p:sp>
@@ -11379,6 +11572,7 @@
             <a:normAutofit/>
           </a:bodyPr>
           <a:lstStyle/>
+          <a:p/>
         </p:txBody>
       </p:sp>
       <p:sp>
@@ -11571,7 +11765,7 @@
     </p:spTree>
   </p:cSld>
   <p:clrMapOvr>
-    <a:overrideClrMapping bg1="lt1" tx1="dk1" bg2="lt2" tx2="dk2" accent1="accent1" accent2="accent2" accent3="accent3" accent4="accent4" accent5="accent5" accent6="accent6" hlink="hlink" folHlink="folHlink"/>
+    <a:masterClrMapping/>
   </p:clrMapOvr>
 </p:sld>
 </file>
@@ -11620,6 +11814,7 @@
             <a:normAutofit/>
           </a:bodyPr>
           <a:lstStyle/>
+          <a:p/>
         </p:txBody>
       </p:sp>
       <p:sp>
@@ -11766,7 +11961,7 @@
     </p:spTree>
   </p:cSld>
   <p:clrMapOvr>
-    <a:overrideClrMapping bg1="lt1" tx1="dk1" bg2="lt2" tx2="dk2" accent1="accent1" accent2="accent2" accent3="accent3" accent4="accent4" accent5="accent5" accent6="accent6" hlink="hlink" folHlink="folHlink"/>
+    <a:masterClrMapping/>
   </p:clrMapOvr>
 </p:sld>
 </file>
@@ -11909,6 +12104,7 @@
             <a:normAutofit/>
           </a:bodyPr>
           <a:lstStyle/>
+          <a:p/>
         </p:txBody>
       </p:sp>
       <p:sp>
@@ -11939,6 +12135,7 @@
             <a:normAutofit/>
           </a:bodyPr>
           <a:lstStyle/>
+          <a:p/>
         </p:txBody>
       </p:sp>
       <p:sp>
@@ -11967,6 +12164,7 @@
             <a:normAutofit/>
           </a:bodyPr>
           <a:lstStyle/>
+          <a:p/>
         </p:txBody>
       </p:sp>
       <p:sp>
@@ -12199,6 +12397,7 @@
             <a:normAutofit/>
           </a:bodyPr>
           <a:lstStyle/>
+          <a:p/>
         </p:txBody>
       </p:sp>
       <p:sp>
@@ -12227,6 +12426,7 @@
             <a:normAutofit/>
           </a:bodyPr>
           <a:lstStyle/>
+          <a:p/>
         </p:txBody>
       </p:sp>
       <p:sp>
@@ -12434,7 +12634,7 @@
     </p:spTree>
   </p:cSld>
   <p:clrMapOvr>
-    <a:overrideClrMapping bg1="lt1" tx1="dk1" bg2="lt2" tx2="dk2" accent1="accent1" accent2="accent2" accent3="accent3" accent4="accent4" accent5="accent5" accent6="accent6" hlink="hlink" folHlink="folHlink"/>
+    <a:masterClrMapping/>
   </p:clrMapOvr>
 </p:sld>
 </file>
@@ -12577,6 +12777,7 @@
             <a:normAutofit/>
           </a:bodyPr>
           <a:lstStyle/>
+          <a:p/>
         </p:txBody>
       </p:sp>
       <p:sp>
@@ -13445,7 +13646,7 @@
     </p:spTree>
   </p:cSld>
   <p:clrMapOvr>
-    <a:overrideClrMapping bg1="lt1" tx1="dk1" bg2="lt2" tx2="dk2" accent1="accent1" accent2="accent2" accent3="accent3" accent4="accent4" accent5="accent5" accent6="accent6" hlink="hlink" folHlink="folHlink"/>
+    <a:masterClrMapping/>
   </p:clrMapOvr>
 </p:sld>
 </file>
@@ -13494,6 +13695,7 @@
             <a:normAutofit/>
           </a:bodyPr>
           <a:lstStyle/>
+          <a:p/>
         </p:txBody>
       </p:sp>
       <p:sp>
@@ -13569,6 +13771,7 @@
             <a:normAutofit/>
           </a:bodyPr>
           <a:lstStyle/>
+          <a:p/>
         </p:txBody>
       </p:sp>
       <p:sp>
@@ -13668,7 +13871,7 @@
     </p:spTree>
   </p:cSld>
   <p:clrMapOvr>
-    <a:overrideClrMapping bg1="lt1" tx1="dk1" bg2="lt2" tx2="dk2" accent1="accent1" accent2="accent2" accent3="accent3" accent4="accent4" accent5="accent5" accent6="accent6" hlink="hlink" folHlink="folHlink"/>
+    <a:masterClrMapping/>
   </p:clrMapOvr>
 </p:sld>
 </file>
@@ -13717,6 +13920,7 @@
             <a:normAutofit/>
           </a:bodyPr>
           <a:lstStyle/>
+          <a:p/>
         </p:txBody>
       </p:sp>
       <p:sp>
@@ -13863,7 +14067,7 @@
     </p:spTree>
   </p:cSld>
   <p:clrMapOvr>
-    <a:overrideClrMapping bg1="lt1" tx1="dk1" bg2="lt2" tx2="dk2" accent1="accent1" accent2="accent2" accent3="accent3" accent4="accent4" accent5="accent5" accent6="accent6" hlink="hlink" folHlink="folHlink"/>
+    <a:masterClrMapping/>
   </p:clrMapOvr>
 </p:sld>
 </file>
@@ -14006,6 +14210,7 @@
             <a:normAutofit/>
           </a:bodyPr>
           <a:lstStyle/>
+          <a:p/>
         </p:txBody>
       </p:sp>
       <p:sp>
@@ -14036,6 +14241,7 @@
             <a:normAutofit/>
           </a:bodyPr>
           <a:lstStyle/>
+          <a:p/>
         </p:txBody>
       </p:sp>
       <p:sp>
@@ -14064,6 +14270,7 @@
             <a:normAutofit/>
           </a:bodyPr>
           <a:lstStyle/>
+          <a:p/>
         </p:txBody>
       </p:sp>
       <p:sp>
@@ -14234,6 +14441,7 @@
             <a:normAutofit/>
           </a:bodyPr>
           <a:lstStyle/>
+          <a:p/>
         </p:txBody>
       </p:sp>
       <p:sp>
@@ -14262,6 +14470,7 @@
             <a:normAutofit/>
           </a:bodyPr>
           <a:lstStyle/>
+          <a:p/>
         </p:txBody>
       </p:sp>
       <p:sp>
@@ -14430,6 +14639,7 @@
             <a:normAutofit/>
           </a:bodyPr>
           <a:lstStyle/>
+          <a:p/>
         </p:txBody>
       </p:sp>
       <p:sp>
@@ -14502,7 +14712,7 @@
     </p:spTree>
   </p:cSld>
   <p:clrMapOvr>
-    <a:overrideClrMapping bg1="lt1" tx1="dk1" bg2="lt2" tx2="dk2" accent1="accent1" accent2="accent2" accent3="accent3" accent4="accent4" accent5="accent5" accent6="accent6" hlink="hlink" folHlink="folHlink"/>
+    <a:masterClrMapping/>
   </p:clrMapOvr>
 </p:sld>
 </file>
@@ -14645,6 +14855,7 @@
             <a:normAutofit/>
           </a:bodyPr>
           <a:lstStyle/>
+          <a:p/>
         </p:txBody>
       </p:sp>
       <p:sp>
@@ -15224,7 +15435,7 @@
     </p:spTree>
   </p:cSld>
   <p:clrMapOvr>
-    <a:overrideClrMapping bg1="lt1" tx1="dk1" bg2="lt2" tx2="dk2" accent1="accent1" accent2="accent2" accent3="accent3" accent4="accent4" accent5="accent5" accent6="accent6" hlink="hlink" folHlink="folHlink"/>
+    <a:masterClrMapping/>
   </p:clrMapOvr>
 </p:sld>
 </file>
@@ -15273,6 +15484,7 @@
             <a:normAutofit/>
           </a:bodyPr>
           <a:lstStyle/>
+          <a:p/>
         </p:txBody>
       </p:sp>
       <p:sp>
@@ -15419,7 +15631,7 @@
     </p:spTree>
   </p:cSld>
   <p:clrMapOvr>
-    <a:overrideClrMapping bg1="lt1" tx1="dk1" bg2="lt2" tx2="dk2" accent1="accent1" accent2="accent2" accent3="accent3" accent4="accent4" accent5="accent5" accent6="accent6" hlink="hlink" folHlink="folHlink"/>
+    <a:masterClrMapping/>
   </p:clrMapOvr>
 </p:sld>
 </file>
@@ -15562,6 +15774,7 @@
             <a:normAutofit/>
           </a:bodyPr>
           <a:lstStyle/>
+          <a:p/>
         </p:txBody>
       </p:sp>
       <p:sp>
@@ -16251,7 +16464,7 @@
     </p:spTree>
   </p:cSld>
   <p:clrMapOvr>
-    <a:overrideClrMapping bg1="lt1" tx1="dk1" bg2="lt2" tx2="dk2" accent1="accent1" accent2="accent2" accent3="accent3" accent4="accent4" accent5="accent5" accent6="accent6" hlink="hlink" folHlink="folHlink"/>
+    <a:masterClrMapping/>
   </p:clrMapOvr>
 </p:sld>
 </file>
@@ -16394,6 +16607,7 @@
             <a:normAutofit/>
           </a:bodyPr>
           <a:lstStyle/>
+          <a:p/>
         </p:txBody>
       </p:sp>
       <p:sp>
@@ -16424,6 +16638,7 @@
             <a:normAutofit/>
           </a:bodyPr>
           <a:lstStyle/>
+          <a:p/>
         </p:txBody>
       </p:sp>
       <p:sp>
@@ -16452,6 +16667,7 @@
             <a:normAutofit/>
           </a:bodyPr>
           <a:lstStyle/>
+          <a:p/>
         </p:txBody>
       </p:sp>
       <p:sp>
@@ -16653,6 +16869,7 @@
             <a:normAutofit/>
           </a:bodyPr>
           <a:lstStyle/>
+          <a:p/>
         </p:txBody>
       </p:sp>
       <p:sp>
@@ -16681,6 +16898,7 @@
             <a:normAutofit/>
           </a:bodyPr>
           <a:lstStyle/>
+          <a:p/>
         </p:txBody>
       </p:sp>
       <p:sp>
@@ -16904,7 +17122,7 @@
     </p:spTree>
   </p:cSld>
   <p:clrMapOvr>
-    <a:overrideClrMapping bg1="lt1" tx1="dk1" bg2="lt2" tx2="dk2" accent1="accent1" accent2="accent2" accent3="accent3" accent4="accent4" accent5="accent5" accent6="accent6" hlink="hlink" folHlink="folHlink"/>
+    <a:masterClrMapping/>
   </p:clrMapOvr>
 </p:sld>
 </file>
@@ -16953,6 +17171,7 @@
             <a:normAutofit/>
           </a:bodyPr>
           <a:lstStyle/>
+          <a:p/>
         </p:txBody>
       </p:sp>
       <p:sp>
@@ -17099,7 +17318,7 @@
     </p:spTree>
   </p:cSld>
   <p:clrMapOvr>
-    <a:overrideClrMapping bg1="lt1" tx1="dk1" bg2="lt2" tx2="dk2" accent1="accent1" accent2="accent2" accent3="accent3" accent4="accent4" accent5="accent5" accent6="accent6" hlink="hlink" folHlink="folHlink"/>
+    <a:masterClrMapping/>
   </p:clrMapOvr>
 </p:sld>
 </file>
